--- a/docs/VestiCode.pptx
+++ b/docs/VestiCode.pptx
@@ -13485,7 +13485,7 @@
                 <a:ea typeface="Quattrocento Sans" pitchFamily="34" charset="-122"/>
                 <a:cs typeface="Quattrocento Sans" pitchFamily="34" charset="-120"/>
               </a:rPr>
-              <a:t>18</a:t>
+              <a:t>17</a:t>
             </a:r>
             <a:endParaRPr lang="en-US" sz="1200" dirty="0"/>
           </a:p>
@@ -13857,7 +13857,7 @@
                 <a:ea typeface="Liter" pitchFamily="34" charset="-122"/>
                 <a:cs typeface="Liter" pitchFamily="34" charset="-120"/>
               </a:rPr>
-              <a:t>谢谢，请老师提问</a:t>
+              <a:t>谢谢</a:t>
             </a:r>
             <a:endParaRPr lang="en-US" sz="2800" dirty="0"/>
           </a:p>
